--- a/paper/slides.pptx
+++ b/paper/slides.pptx
@@ -3204,7 +3204,7 @@
         <p:spPr>
           <a:xfrm>
             <a:off x="502920" y="640080"/>
-            <a:ext cx="3200400" cy="365760"/>
+            <a:ext cx="2092881" cy="246221"/>
           </a:xfrm>
           <a:prstGeom prst="rect">
             <a:avLst/>
@@ -3219,14 +3219,20 @@
           <a:p>
             <a:pPr algn="l"/>
             <a:r>
-              <a:rPr sz="1000" b="1">
+              <a:rPr lang="en-US" sz="1000" b="1" dirty="0">
                 <a:solidFill>
                   <a:srgbClr val="C9A227"/>
                 </a:solidFill>
                 <a:latin typeface="Calibri"/>
               </a:rPr>
-              <a:t>CS585  ·  KNOWLEDGE ENGINEERING</a:t>
-            </a:r>
+              <a:t>CSCE526301 - Knowledge Engineering</a:t>
+            </a:r>
+            <a:endParaRPr sz="1000" b="1" dirty="0">
+              <a:solidFill>
+                <a:srgbClr val="C9A227"/>
+              </a:solidFill>
+              <a:latin typeface="Calibri"/>
+            </a:endParaRPr>
           </a:p>
         </p:txBody>
       </p:sp>
@@ -3847,40 +3853,6 @@
       </p:sp>
       <p:sp>
         <p:nvSpPr>
-          <p:cNvPr id="7" name="TextBox 6"/>
-          <p:cNvSpPr txBox="1"/>
-          <p:nvPr/>
-        </p:nvSpPr>
-        <p:spPr>
-          <a:xfrm>
-            <a:off x="365760" y="6446520"/>
-            <a:ext cx="5486400" cy="320040"/>
-          </a:xfrm>
-          <a:prstGeom prst="rect">
-            <a:avLst/>
-          </a:prstGeom>
-          <a:noFill/>
-        </p:spPr>
-        <p:txBody>
-          <a:bodyPr wrap="none" lIns="0" rIns="0">
-            <a:spAutoFit/>
-          </a:bodyPr>
-          <a:lstStyle/>
-          <a:p>
-            <a:r>
-              <a:rPr sz="900">
-                <a:solidFill>
-                  <a:srgbClr val="6B6B6B"/>
-                </a:solidFill>
-                <a:latin typeface="Calibri"/>
-              </a:rPr>
-              <a:t>CS585  ·  LLM-Powered Knowledge Graph Extractor</a:t>
-            </a:r>
-          </a:p>
-        </p:txBody>
-      </p:sp>
-      <p:sp>
-        <p:nvSpPr>
           <p:cNvPr id="8" name="TextBox 7"/>
           <p:cNvSpPr txBox="1"/>
           <p:nvPr/>
@@ -4350,40 +4322,6 @@
       </p:sp>
       <p:sp>
         <p:nvSpPr>
-          <p:cNvPr id="9" name="TextBox 8"/>
-          <p:cNvSpPr txBox="1"/>
-          <p:nvPr/>
-        </p:nvSpPr>
-        <p:spPr>
-          <a:xfrm>
-            <a:off x="365760" y="6446520"/>
-            <a:ext cx="5486400" cy="320040"/>
-          </a:xfrm>
-          <a:prstGeom prst="rect">
-            <a:avLst/>
-          </a:prstGeom>
-          <a:noFill/>
-        </p:spPr>
-        <p:txBody>
-          <a:bodyPr wrap="none" lIns="0" rIns="0">
-            <a:spAutoFit/>
-          </a:bodyPr>
-          <a:lstStyle/>
-          <a:p>
-            <a:r>
-              <a:rPr sz="900">
-                <a:solidFill>
-                  <a:srgbClr val="6B6B6B"/>
-                </a:solidFill>
-                <a:latin typeface="Calibri"/>
-              </a:rPr>
-              <a:t>CS585  ·  LLM-Powered Knowledge Graph Extractor</a:t>
-            </a:r>
-          </a:p>
-        </p:txBody>
-      </p:sp>
-      <p:sp>
-        <p:nvSpPr>
           <p:cNvPr id="10" name="TextBox 9"/>
           <p:cNvSpPr txBox="1"/>
           <p:nvPr/>
@@ -5387,40 +5325,6 @@
       </p:sp>
       <p:sp>
         <p:nvSpPr>
-          <p:cNvPr id="27" name="TextBox 26"/>
-          <p:cNvSpPr txBox="1"/>
-          <p:nvPr/>
-        </p:nvSpPr>
-        <p:spPr>
-          <a:xfrm>
-            <a:off x="365760" y="6446520"/>
-            <a:ext cx="5486400" cy="320040"/>
-          </a:xfrm>
-          <a:prstGeom prst="rect">
-            <a:avLst/>
-          </a:prstGeom>
-          <a:noFill/>
-        </p:spPr>
-        <p:txBody>
-          <a:bodyPr wrap="none" lIns="0" rIns="0">
-            <a:spAutoFit/>
-          </a:bodyPr>
-          <a:lstStyle/>
-          <a:p>
-            <a:r>
-              <a:rPr sz="900">
-                <a:solidFill>
-                  <a:srgbClr val="6B6B6B"/>
-                </a:solidFill>
-                <a:latin typeface="Calibri"/>
-              </a:rPr>
-              <a:t>CS585  ·  LLM-Powered Knowledge Graph Extractor</a:t>
-            </a:r>
-          </a:p>
-        </p:txBody>
-      </p:sp>
-      <p:sp>
-        <p:nvSpPr>
           <p:cNvPr id="28" name="TextBox 27"/>
           <p:cNvSpPr txBox="1"/>
           <p:nvPr/>
@@ -5743,40 +5647,6 @@
               </a:solidFill>
               <a:latin typeface="Calibri"/>
             </a:endParaRPr>
-          </a:p>
-        </p:txBody>
-      </p:sp>
-      <p:sp>
-        <p:nvSpPr>
-          <p:cNvPr id="7" name="TextBox 6"/>
-          <p:cNvSpPr txBox="1"/>
-          <p:nvPr/>
-        </p:nvSpPr>
-        <p:spPr>
-          <a:xfrm>
-            <a:off x="365760" y="6446520"/>
-            <a:ext cx="5486400" cy="320040"/>
-          </a:xfrm>
-          <a:prstGeom prst="rect">
-            <a:avLst/>
-          </a:prstGeom>
-          <a:noFill/>
-        </p:spPr>
-        <p:txBody>
-          <a:bodyPr wrap="none" lIns="0" rIns="0">
-            <a:spAutoFit/>
-          </a:bodyPr>
-          <a:lstStyle/>
-          <a:p>
-            <a:r>
-              <a:rPr sz="900">
-                <a:solidFill>
-                  <a:srgbClr val="6B6B6B"/>
-                </a:solidFill>
-                <a:latin typeface="Calibri"/>
-              </a:rPr>
-              <a:t>CS585  ·  LLM-Powered Knowledge Graph Extractor</a:t>
-            </a:r>
           </a:p>
         </p:txBody>
       </p:sp>
@@ -5969,46 +5839,6 @@
       </p:sp>
       <p:sp>
         <p:nvSpPr>
-          <p:cNvPr id="7" name="TextBox 6">
-            <a:extLst>
-              <a:ext uri="{FF2B5EF4-FFF2-40B4-BE49-F238E27FC236}">
-                <a16:creationId xmlns:a16="http://schemas.microsoft.com/office/drawing/2014/main" id="{8034A2D0-41BA-5F06-B4F7-30F7EA459D2B}"/>
-              </a:ext>
-            </a:extLst>
-          </p:cNvPr>
-          <p:cNvSpPr txBox="1"/>
-          <p:nvPr/>
-        </p:nvSpPr>
-        <p:spPr>
-          <a:xfrm>
-            <a:off x="365760" y="6446520"/>
-            <a:ext cx="5486400" cy="320040"/>
-          </a:xfrm>
-          <a:prstGeom prst="rect">
-            <a:avLst/>
-          </a:prstGeom>
-          <a:noFill/>
-        </p:spPr>
-        <p:txBody>
-          <a:bodyPr wrap="none" lIns="0" rIns="0">
-            <a:spAutoFit/>
-          </a:bodyPr>
-          <a:lstStyle/>
-          <a:p>
-            <a:r>
-              <a:rPr sz="900">
-                <a:solidFill>
-                  <a:srgbClr val="6B6B6B"/>
-                </a:solidFill>
-                <a:latin typeface="Calibri"/>
-              </a:rPr>
-              <a:t>CS585  ·  LLM-Powered Knowledge Graph Extractor</a:t>
-            </a:r>
-          </a:p>
-        </p:txBody>
-      </p:sp>
-      <p:sp>
-        <p:nvSpPr>
           <p:cNvPr id="8" name="TextBox 7">
             <a:extLst>
               <a:ext uri="{FF2B5EF4-FFF2-40B4-BE49-F238E27FC236}">
@@ -6070,7 +5900,7 @@
         </p:blipFill>
         <p:spPr>
           <a:xfrm>
-            <a:off x="0" y="152267"/>
+            <a:off x="91440" y="164592"/>
             <a:ext cx="12140316" cy="6693408"/>
           </a:xfrm>
           <a:prstGeom prst="rect">
@@ -6499,46 +6329,6 @@
       </p:sp>
       <p:sp>
         <p:nvSpPr>
-          <p:cNvPr id="7" name="TextBox 6">
-            <a:extLst>
-              <a:ext uri="{FF2B5EF4-FFF2-40B4-BE49-F238E27FC236}">
-                <a16:creationId xmlns:a16="http://schemas.microsoft.com/office/drawing/2014/main" id="{6E0CD899-E46D-0854-B8F6-D3E63F29E51E}"/>
-              </a:ext>
-            </a:extLst>
-          </p:cNvPr>
-          <p:cNvSpPr txBox="1"/>
-          <p:nvPr/>
-        </p:nvSpPr>
-        <p:spPr>
-          <a:xfrm>
-            <a:off x="365760" y="6446520"/>
-            <a:ext cx="5486400" cy="320040"/>
-          </a:xfrm>
-          <a:prstGeom prst="rect">
-            <a:avLst/>
-          </a:prstGeom>
-          <a:noFill/>
-        </p:spPr>
-        <p:txBody>
-          <a:bodyPr wrap="none" lIns="0" rIns="0">
-            <a:spAutoFit/>
-          </a:bodyPr>
-          <a:lstStyle/>
-          <a:p>
-            <a:r>
-              <a:rPr sz="900">
-                <a:solidFill>
-                  <a:srgbClr val="6B6B6B"/>
-                </a:solidFill>
-                <a:latin typeface="Calibri"/>
-              </a:rPr>
-              <a:t>CS585  ·  LLM-Powered Knowledge Graph Extractor</a:t>
-            </a:r>
-          </a:p>
-        </p:txBody>
-      </p:sp>
-      <p:sp>
-        <p:nvSpPr>
           <p:cNvPr id="8" name="TextBox 7">
             <a:extLst>
               <a:ext uri="{FF2B5EF4-FFF2-40B4-BE49-F238E27FC236}">
@@ -7068,46 +6858,6 @@
       </p:sp>
       <p:sp>
         <p:nvSpPr>
-          <p:cNvPr id="7" name="TextBox 6">
-            <a:extLst>
-              <a:ext uri="{FF2B5EF4-FFF2-40B4-BE49-F238E27FC236}">
-                <a16:creationId xmlns:a16="http://schemas.microsoft.com/office/drawing/2014/main" id="{A32B790B-B4A3-CD70-D1B3-389DB81BF993}"/>
-              </a:ext>
-            </a:extLst>
-          </p:cNvPr>
-          <p:cNvSpPr txBox="1"/>
-          <p:nvPr/>
-        </p:nvSpPr>
-        <p:spPr>
-          <a:xfrm>
-            <a:off x="365760" y="6446520"/>
-            <a:ext cx="5486400" cy="320040"/>
-          </a:xfrm>
-          <a:prstGeom prst="rect">
-            <a:avLst/>
-          </a:prstGeom>
-          <a:noFill/>
-        </p:spPr>
-        <p:txBody>
-          <a:bodyPr wrap="none" lIns="0" rIns="0">
-            <a:spAutoFit/>
-          </a:bodyPr>
-          <a:lstStyle/>
-          <a:p>
-            <a:r>
-              <a:rPr sz="900">
-                <a:solidFill>
-                  <a:srgbClr val="6B6B6B"/>
-                </a:solidFill>
-                <a:latin typeface="Calibri"/>
-              </a:rPr>
-              <a:t>CS585  ·  LLM-Powered Knowledge Graph Extractor</a:t>
-            </a:r>
-          </a:p>
-        </p:txBody>
-      </p:sp>
-      <p:sp>
-        <p:nvSpPr>
           <p:cNvPr id="8" name="TextBox 7">
             <a:extLst>
               <a:ext uri="{FF2B5EF4-FFF2-40B4-BE49-F238E27FC236}">
@@ -7485,40 +7235,6 @@
       </p:sp>
       <p:sp>
         <p:nvSpPr>
-          <p:cNvPr id="7" name="TextBox 6"/>
-          <p:cNvSpPr txBox="1"/>
-          <p:nvPr/>
-        </p:nvSpPr>
-        <p:spPr>
-          <a:xfrm>
-            <a:off x="365760" y="6446520"/>
-            <a:ext cx="5486400" cy="320040"/>
-          </a:xfrm>
-          <a:prstGeom prst="rect">
-            <a:avLst/>
-          </a:prstGeom>
-          <a:noFill/>
-        </p:spPr>
-        <p:txBody>
-          <a:bodyPr wrap="none" lIns="0" rIns="0">
-            <a:spAutoFit/>
-          </a:bodyPr>
-          <a:lstStyle/>
-          <a:p>
-            <a:r>
-              <a:rPr sz="900">
-                <a:solidFill>
-                  <a:srgbClr val="6B6B6B"/>
-                </a:solidFill>
-                <a:latin typeface="Calibri"/>
-              </a:rPr>
-              <a:t>CS585  ·  LLM-Powered Knowledge Graph Extractor</a:t>
-            </a:r>
-          </a:p>
-        </p:txBody>
-      </p:sp>
-      <p:sp>
-        <p:nvSpPr>
           <p:cNvPr id="8" name="TextBox 7"/>
           <p:cNvSpPr txBox="1"/>
           <p:nvPr/>
@@ -7920,40 +7636,6 @@
       </p:sp>
       <p:sp>
         <p:nvSpPr>
-          <p:cNvPr id="8" name="TextBox 7"/>
-          <p:cNvSpPr txBox="1"/>
-          <p:nvPr/>
-        </p:nvSpPr>
-        <p:spPr>
-          <a:xfrm>
-            <a:off x="365760" y="6446520"/>
-            <a:ext cx="5486400" cy="320040"/>
-          </a:xfrm>
-          <a:prstGeom prst="rect">
-            <a:avLst/>
-          </a:prstGeom>
-          <a:noFill/>
-        </p:spPr>
-        <p:txBody>
-          <a:bodyPr wrap="none" lIns="0" rIns="0">
-            <a:spAutoFit/>
-          </a:bodyPr>
-          <a:lstStyle/>
-          <a:p>
-            <a:r>
-              <a:rPr sz="900">
-                <a:solidFill>
-                  <a:srgbClr val="6B6B6B"/>
-                </a:solidFill>
-                <a:latin typeface="Calibri"/>
-              </a:rPr>
-              <a:t>CS585  ·  LLM-Powered Knowledge Graph Extractor</a:t>
-            </a:r>
-          </a:p>
-        </p:txBody>
-      </p:sp>
-      <p:sp>
-        <p:nvSpPr>
           <p:cNvPr id="9" name="TextBox 8"/>
           <p:cNvSpPr txBox="1"/>
           <p:nvPr/>
@@ -8372,40 +8054,6 @@
       </p:sp>
       <p:sp>
         <p:nvSpPr>
-          <p:cNvPr id="9" name="TextBox 8"/>
-          <p:cNvSpPr txBox="1"/>
-          <p:nvPr/>
-        </p:nvSpPr>
-        <p:spPr>
-          <a:xfrm>
-            <a:off x="365760" y="6446520"/>
-            <a:ext cx="5486400" cy="320040"/>
-          </a:xfrm>
-          <a:prstGeom prst="rect">
-            <a:avLst/>
-          </a:prstGeom>
-          <a:noFill/>
-        </p:spPr>
-        <p:txBody>
-          <a:bodyPr wrap="none" lIns="0" rIns="0">
-            <a:spAutoFit/>
-          </a:bodyPr>
-          <a:lstStyle/>
-          <a:p>
-            <a:r>
-              <a:rPr sz="900">
-                <a:solidFill>
-                  <a:srgbClr val="6B6B6B"/>
-                </a:solidFill>
-                <a:latin typeface="Calibri"/>
-              </a:rPr>
-              <a:t>CS585  ·  LLM-Powered Knowledge Graph Extractor</a:t>
-            </a:r>
-          </a:p>
-        </p:txBody>
-      </p:sp>
-      <p:sp>
-        <p:nvSpPr>
           <p:cNvPr id="10" name="TextBox 9"/>
           <p:cNvSpPr txBox="1"/>
           <p:nvPr/>
@@ -8832,40 +8480,6 @@
       </p:sp>
       <p:sp>
         <p:nvSpPr>
-          <p:cNvPr id="9" name="TextBox 8"/>
-          <p:cNvSpPr txBox="1"/>
-          <p:nvPr/>
-        </p:nvSpPr>
-        <p:spPr>
-          <a:xfrm>
-            <a:off x="365760" y="6446520"/>
-            <a:ext cx="5486400" cy="320040"/>
-          </a:xfrm>
-          <a:prstGeom prst="rect">
-            <a:avLst/>
-          </a:prstGeom>
-          <a:noFill/>
-        </p:spPr>
-        <p:txBody>
-          <a:bodyPr wrap="none" lIns="0" rIns="0">
-            <a:spAutoFit/>
-          </a:bodyPr>
-          <a:lstStyle/>
-          <a:p>
-            <a:r>
-              <a:rPr sz="900">
-                <a:solidFill>
-                  <a:srgbClr val="6B6B6B"/>
-                </a:solidFill>
-                <a:latin typeface="Calibri"/>
-              </a:rPr>
-              <a:t>CS585  ·  LLM-Powered Knowledge Graph Extractor</a:t>
-            </a:r>
-          </a:p>
-        </p:txBody>
-      </p:sp>
-      <p:sp>
-        <p:nvSpPr>
           <p:cNvPr id="10" name="TextBox 9"/>
           <p:cNvSpPr txBox="1"/>
           <p:nvPr/>
@@ -9283,40 +8897,6 @@
       </p:sp>
       <p:sp>
         <p:nvSpPr>
-          <p:cNvPr id="7" name="TextBox 6"/>
-          <p:cNvSpPr txBox="1"/>
-          <p:nvPr/>
-        </p:nvSpPr>
-        <p:spPr>
-          <a:xfrm>
-            <a:off x="365760" y="6446520"/>
-            <a:ext cx="5486400" cy="320040"/>
-          </a:xfrm>
-          <a:prstGeom prst="rect">
-            <a:avLst/>
-          </a:prstGeom>
-          <a:noFill/>
-        </p:spPr>
-        <p:txBody>
-          <a:bodyPr wrap="none" lIns="0" rIns="0">
-            <a:spAutoFit/>
-          </a:bodyPr>
-          <a:lstStyle/>
-          <a:p>
-            <a:r>
-              <a:rPr sz="900">
-                <a:solidFill>
-                  <a:srgbClr val="6B6B6B"/>
-                </a:solidFill>
-                <a:latin typeface="Calibri"/>
-              </a:rPr>
-              <a:t>CS585  ·  LLM-Powered Knowledge Graph Extractor</a:t>
-            </a:r>
-          </a:p>
-        </p:txBody>
-      </p:sp>
-      <p:sp>
-        <p:nvSpPr>
           <p:cNvPr id="8" name="TextBox 7"/>
           <p:cNvSpPr txBox="1"/>
           <p:nvPr/>
@@ -10091,40 +9671,6 @@
       </p:sp>
       <p:sp>
         <p:nvSpPr>
-          <p:cNvPr id="17" name="TextBox 16"/>
-          <p:cNvSpPr txBox="1"/>
-          <p:nvPr/>
-        </p:nvSpPr>
-        <p:spPr>
-          <a:xfrm>
-            <a:off x="365760" y="6446520"/>
-            <a:ext cx="5486400" cy="320040"/>
-          </a:xfrm>
-          <a:prstGeom prst="rect">
-            <a:avLst/>
-          </a:prstGeom>
-          <a:noFill/>
-        </p:spPr>
-        <p:txBody>
-          <a:bodyPr wrap="none" lIns="0" rIns="0">
-            <a:spAutoFit/>
-          </a:bodyPr>
-          <a:lstStyle/>
-          <a:p>
-            <a:r>
-              <a:rPr sz="900">
-                <a:solidFill>
-                  <a:srgbClr val="6B6B6B"/>
-                </a:solidFill>
-                <a:latin typeface="Calibri"/>
-              </a:rPr>
-              <a:t>CS585  ·  LLM-Powered Knowledge Graph Extractor</a:t>
-            </a:r>
-          </a:p>
-        </p:txBody>
-      </p:sp>
-      <p:sp>
-        <p:nvSpPr>
           <p:cNvPr id="18" name="TextBox 17"/>
           <p:cNvSpPr txBox="1"/>
           <p:nvPr/>
@@ -10615,40 +10161,6 @@
       </p:sp>
       <p:sp>
         <p:nvSpPr>
-          <p:cNvPr id="13" name="TextBox 12"/>
-          <p:cNvSpPr txBox="1"/>
-          <p:nvPr/>
-        </p:nvSpPr>
-        <p:spPr>
-          <a:xfrm>
-            <a:off x="365760" y="6446520"/>
-            <a:ext cx="5486400" cy="320040"/>
-          </a:xfrm>
-          <a:prstGeom prst="rect">
-            <a:avLst/>
-          </a:prstGeom>
-          <a:noFill/>
-        </p:spPr>
-        <p:txBody>
-          <a:bodyPr wrap="none" lIns="0" rIns="0">
-            <a:spAutoFit/>
-          </a:bodyPr>
-          <a:lstStyle/>
-          <a:p>
-            <a:r>
-              <a:rPr sz="900">
-                <a:solidFill>
-                  <a:srgbClr val="6B6B6B"/>
-                </a:solidFill>
-                <a:latin typeface="Calibri"/>
-              </a:rPr>
-              <a:t>CS585  ·  LLM-Powered Knowledge Graph Extractor</a:t>
-            </a:r>
-          </a:p>
-        </p:txBody>
-      </p:sp>
-      <p:sp>
-        <p:nvSpPr>
           <p:cNvPr id="14" name="TextBox 13"/>
           <p:cNvSpPr txBox="1"/>
           <p:nvPr/>
@@ -11095,40 +10607,6 @@
       </p:sp>
       <p:sp>
         <p:nvSpPr>
-          <p:cNvPr id="8" name="TextBox 7"/>
-          <p:cNvSpPr txBox="1"/>
-          <p:nvPr/>
-        </p:nvSpPr>
-        <p:spPr>
-          <a:xfrm>
-            <a:off x="365760" y="6446520"/>
-            <a:ext cx="5486400" cy="320040"/>
-          </a:xfrm>
-          <a:prstGeom prst="rect">
-            <a:avLst/>
-          </a:prstGeom>
-          <a:noFill/>
-        </p:spPr>
-        <p:txBody>
-          <a:bodyPr wrap="none" lIns="0" rIns="0">
-            <a:spAutoFit/>
-          </a:bodyPr>
-          <a:lstStyle/>
-          <a:p>
-            <a:r>
-              <a:rPr sz="900">
-                <a:solidFill>
-                  <a:srgbClr val="6B6B6B"/>
-                </a:solidFill>
-                <a:latin typeface="Calibri"/>
-              </a:rPr>
-              <a:t>CS585  ·  LLM-Powered Knowledge Graph Extractor</a:t>
-            </a:r>
-          </a:p>
-        </p:txBody>
-      </p:sp>
-      <p:sp>
-        <p:nvSpPr>
           <p:cNvPr id="9" name="TextBox 8"/>
           <p:cNvSpPr txBox="1"/>
           <p:nvPr/>
@@ -11599,40 +11077,6 @@
       </p:sp>
       <p:sp>
         <p:nvSpPr>
-          <p:cNvPr id="9" name="TextBox 8"/>
-          <p:cNvSpPr txBox="1"/>
-          <p:nvPr/>
-        </p:nvSpPr>
-        <p:spPr>
-          <a:xfrm>
-            <a:off x="365760" y="6446520"/>
-            <a:ext cx="5486400" cy="320040"/>
-          </a:xfrm>
-          <a:prstGeom prst="rect">
-            <a:avLst/>
-          </a:prstGeom>
-          <a:noFill/>
-        </p:spPr>
-        <p:txBody>
-          <a:bodyPr wrap="none" lIns="0" rIns="0">
-            <a:spAutoFit/>
-          </a:bodyPr>
-          <a:lstStyle/>
-          <a:p>
-            <a:r>
-              <a:rPr sz="900">
-                <a:solidFill>
-                  <a:srgbClr val="6B6B6B"/>
-                </a:solidFill>
-                <a:latin typeface="Calibri"/>
-              </a:rPr>
-              <a:t>CS585  ·  LLM-Powered Knowledge Graph Extractor</a:t>
-            </a:r>
-          </a:p>
-        </p:txBody>
-      </p:sp>
-      <p:sp>
-        <p:nvSpPr>
           <p:cNvPr id="10" name="TextBox 9"/>
           <p:cNvSpPr txBox="1"/>
           <p:nvPr/>
@@ -12005,40 +11449,6 @@
                 <a:latin typeface="Calibri"/>
               </a:rPr>
               <a:t>Downstream tools can verify WHY each fact is in the graph, not just WHAT it claims.</a:t>
-            </a:r>
-          </a:p>
-        </p:txBody>
-      </p:sp>
-      <p:sp>
-        <p:nvSpPr>
-          <p:cNvPr id="8" name="TextBox 7"/>
-          <p:cNvSpPr txBox="1"/>
-          <p:nvPr/>
-        </p:nvSpPr>
-        <p:spPr>
-          <a:xfrm>
-            <a:off x="365760" y="6446520"/>
-            <a:ext cx="5486400" cy="320040"/>
-          </a:xfrm>
-          <a:prstGeom prst="rect">
-            <a:avLst/>
-          </a:prstGeom>
-          <a:noFill/>
-        </p:spPr>
-        <p:txBody>
-          <a:bodyPr wrap="none" lIns="0" rIns="0">
-            <a:spAutoFit/>
-          </a:bodyPr>
-          <a:lstStyle/>
-          <a:p>
-            <a:r>
-              <a:rPr sz="900">
-                <a:solidFill>
-                  <a:srgbClr val="6B6B6B"/>
-                </a:solidFill>
-                <a:latin typeface="Calibri"/>
-              </a:rPr>
-              <a:t>CS585  ·  LLM-Powered Knowledge Graph Extractor</a:t>
             </a:r>
           </a:p>
         </p:txBody>
